--- a/assets/pptx/catalog-52.pptx
+++ b/assets/pptx/catalog-52.pptx
@@ -3302,7 +3302,7 @@
                 <a:ea typeface="Ebrima"/>
                 <a:cs typeface="Ebrima"/>
               </a:rPr>
-              <a:t>ደጉ ሊቀ ካህን አለኝ (2x)</a:t>
+              <a:t>ደጉ ሊቀ ካህን አለኝ 2x</a:t>
             </a:r>
           </a:p>
         </p:txBody>
@@ -3369,7 +3369,7 @@
                 <a:ea typeface="Ebrima"/>
                 <a:cs typeface="Ebrima"/>
               </a:rPr>
-              <a:t>- ሊቀ ካህኔ ኢየሱሴ (2x)</a:t>
+              <a:t>- ሊቀ ካህኔ ኢየሱሴ 2x</a:t>
             </a:r>
           </a:p>
           <a:p>
@@ -3405,7 +3405,7 @@
                 <a:ea typeface="Ebrima"/>
                 <a:cs typeface="Ebrima"/>
               </a:rPr>
-              <a:t>አለልኝ በሰማይ ለነፍሴ (2x)</a:t>
+              <a:t>አለልኝ በሰማይ ለነፍሴ 2x</a:t>
             </a:r>
           </a:p>
         </p:txBody>
@@ -4010,7 +4010,7 @@
                 <a:ea typeface="Ebrima"/>
                 <a:cs typeface="Ebrima"/>
               </a:rPr>
-              <a:t>መቆሜ ከእርሱ የተነሳ ነው (2x)</a:t>
+              <a:t>መቆሜ ከእርሱ የተነሳ ነው 2x</a:t>
             </a:r>
           </a:p>
         </p:txBody>
@@ -4077,7 +4077,7 @@
                 <a:ea typeface="Ebrima"/>
                 <a:cs typeface="Ebrima"/>
               </a:rPr>
-              <a:t>- ሊቀ ካህኔ ኢየሱሴ (2x)</a:t>
+              <a:t>- ሊቀ ካህኔ ኢየሱሴ 2x</a:t>
             </a:r>
           </a:p>
           <a:p>
@@ -4113,7 +4113,7 @@
                 <a:ea typeface="Ebrima"/>
                 <a:cs typeface="Ebrima"/>
               </a:rPr>
-              <a:t>አለልኝ በሰማይ ለነፍሴ (2x)</a:t>
+              <a:t>አለልኝ በሰማይ ለነፍሴ 2x</a:t>
             </a:r>
           </a:p>
         </p:txBody>
